--- a/report/TFM_defense_template.pptx
+++ b/report/TFM_defense_template.pptx
@@ -2728,67 +2728,6 @@
               <a:rPr lang="en-US" smtClean="0"/>
               <a:t>Click to edit Master title style</a:t>
             </a:r>
-            <a:endParaRPr lang="en-US"/>
-          </a:p>
-        </p:txBody>
-      </p:sp>
-      <p:sp>
-        <p:nvSpPr>
-          <p:cNvPr id="3" name="Picture Placeholder 2"/>
-          <p:cNvSpPr>
-            <a:spLocks noGrp="1"/>
-          </p:cNvSpPr>
-          <p:nvPr>
-            <p:ph type="pic" idx="1"/>
-          </p:nvPr>
-        </p:nvSpPr>
-        <p:spPr>
-          <a:xfrm>
-            <a:off x="1792288" y="612775"/>
-            <a:ext cx="5486400" cy="4114800"/>
-          </a:xfrm>
-        </p:spPr>
-        <p:txBody>
-          <a:bodyPr/>
-          <a:lstStyle>
-            <a:lvl1pPr marL="0" indent="0">
-              <a:buNone/>
-              <a:defRPr sz="3200"/>
-            </a:lvl1pPr>
-            <a:lvl2pPr marL="457200" indent="0">
-              <a:buNone/>
-              <a:defRPr sz="2800"/>
-            </a:lvl2pPr>
-            <a:lvl3pPr marL="914400" indent="0">
-              <a:buNone/>
-              <a:defRPr sz="2400"/>
-            </a:lvl3pPr>
-            <a:lvl4pPr marL="1371600" indent="0">
-              <a:buNone/>
-              <a:defRPr sz="2000"/>
-            </a:lvl4pPr>
-            <a:lvl5pPr marL="1828800" indent="0">
-              <a:buNone/>
-              <a:defRPr sz="2000"/>
-            </a:lvl5pPr>
-            <a:lvl6pPr marL="2286000" indent="0">
-              <a:buNone/>
-              <a:defRPr sz="2000"/>
-            </a:lvl6pPr>
-            <a:lvl7pPr marL="2743200" indent="0">
-              <a:buNone/>
-              <a:defRPr sz="2000"/>
-            </a:lvl7pPr>
-            <a:lvl8pPr marL="3200400" indent="0">
-              <a:buNone/>
-              <a:defRPr sz="2000"/>
-            </a:lvl8pPr>
-            <a:lvl9pPr marL="3657600" indent="0">
-              <a:buNone/>
-              <a:defRPr sz="2000"/>
-            </a:lvl9pPr>
-          </a:lstStyle>
-          <a:p>
             <a:endParaRPr lang="en-US"/>
           </a:p>
         </p:txBody>
